--- a/LabBook_10.pptx
+++ b/LabBook_10.pptx
@@ -233,7 +233,7 @@
           <a:p>
             <a:fld id="{8438F8DC-35B0-48E6-A86E-42F1F08DD00F}" type="datetimeFigureOut">
               <a:rPr lang="es-ES" smtClean="0"/>
-              <a:t>16/02/2026</a:t>
+              <a:t>15/03/2026</a:t>
             </a:fld>
             <a:endParaRPr lang="es-ES"/>
           </a:p>
@@ -410,7 +410,7 @@
           <a:p>
             <a:fld id="{FACBDC12-F39B-4B97-8F4D-6734F9D366FF}" type="datetimeFigureOut">
               <a:rPr lang="es-ES" smtClean="0"/>
-              <a:t>16/02/2026</a:t>
+              <a:t>15/03/2026</a:t>
             </a:fld>
             <a:endParaRPr lang="es-ES"/>
           </a:p>
@@ -2710,7 +2710,7 @@
                 <a:latin typeface="Arial"/>
                 <a:cs typeface="Arial"/>
               </a:rPr>
-              <a:t>: </a:t>
+              <a:t>: Marco Ibáñez Véliz</a:t>
             </a:r>
             <a:endParaRPr sz="1800" dirty="0">
               <a:latin typeface="Arial"/>
@@ -4912,15 +4912,15 @@
         </p:nvSpPr>
         <p:spPr>
           <a:xfrm>
-            <a:off x="608012" y="1295400"/>
-            <a:ext cx="11048999" cy="4958137"/>
+            <a:off x="640080" y="1325880"/>
+            <a:ext cx="4160520" cy="3931920"/>
           </a:xfrm>
           <a:prstGeom prst="rect">
             <a:avLst/>
           </a:prstGeom>
         </p:spPr>
         <p:txBody>
-          <a:bodyPr>
+          <a:bodyPr wrap="square">
             <a:normAutofit/>
           </a:bodyPr>
           <a:lstStyle>
@@ -4989,132 +4989,81 @@
             </a:lvl9pPr>
           </a:lstStyle>
           <a:p>
-            <a:pPr marL="0" indent="0">
+            <a:pPr marL="0" indent="0" algn="l">
               <a:buNone/>
+              <a:defRPr sz="1500" b="1"/>
             </a:pPr>
             <a:r>
-              <a:rPr lang="en-US" sz="2000" b="1" dirty="0"/>
-              <a:t>INSTRUCTOR:</a:t>
-            </a:r>
-          </a:p>
-          <a:p>
-            <a:pPr marL="342900" indent="-342900" algn="just">
-              <a:buFont typeface="Arial" panose="020B0604020202020204" pitchFamily="34" charset="0"/>
-              <a:buChar char="•"/>
+              <a:t>Deep SiNx waveguide</a:t>
+            </a:r>
+          </a:p>
+          <a:p>
+            <a:pPr algn="l">
+              <a:defRPr sz="1500" b="0"/>
             </a:pPr>
             <a:r>
-              <a:rPr lang="en-US" sz="2000" dirty="0"/>
-              <a:t>Present Python and </a:t>
-            </a:r>
-            <a:r>
-              <a:rPr lang="en-US" sz="2000" dirty="0" err="1"/>
-              <a:t>GDSFactory</a:t>
-            </a:r>
-            <a:r>
-              <a:rPr lang="en-US" sz="2000" dirty="0"/>
-              <a:t>: materials, output, results.</a:t>
-            </a:r>
-          </a:p>
-          <a:p>
-            <a:pPr marL="342900" indent="-342900" algn="just">
-              <a:buFont typeface="Arial" panose="020B0604020202020204" pitchFamily="34" charset="0"/>
-              <a:buChar char="•"/>
+              <a:t>w = 1.2 um, h = 300 nm, lambda = 1.55 um</a:t>
+            </a:r>
+          </a:p>
+          <a:p>
+            <a:pPr algn="l">
+              <a:defRPr sz="1500" b="0"/>
             </a:pPr>
             <a:r>
-              <a:rPr lang="en-US" sz="2000" dirty="0"/>
-              <a:t>Explain how to run a simulation for a particular cross-section. </a:t>
-            </a:r>
-          </a:p>
-          <a:p>
-            <a:pPr marL="342900" indent="-342900" algn="just">
-              <a:buFont typeface="Arial" panose="020B0604020202020204" pitchFamily="34" charset="0"/>
-              <a:buChar char="•"/>
+              <a:t>Core: SiNx, cladding: SiO2</a:t>
+            </a:r>
+          </a:p>
+          <a:p>
+            <a:pPr algn="l">
+              <a:defRPr sz="1500" b="0"/>
             </a:pPr>
-            <a:r>
-              <a:rPr lang="en-US" sz="2000" dirty="0"/>
-              <a:t>Showcase how to change between shallow and deep waveguide.</a:t>
-            </a:r>
-          </a:p>
-          <a:p>
-            <a:pPr marL="342900" indent="-342900" algn="just">
-              <a:buFont typeface="Arial" panose="020B0604020202020204" pitchFamily="34" charset="0"/>
-              <a:buChar char="•"/>
+            <a:endParaRPr/>
+          </a:p>
+          <a:p>
+            <a:pPr algn="l">
+              <a:defRPr sz="1500" b="0"/>
             </a:pPr>
             <a:r>
-              <a:rPr lang="en-US" sz="2000" dirty="0"/>
-              <a:t>Describe how to change the wavelength and width for the waveguide analysis.</a:t>
-            </a:r>
-          </a:p>
-          <a:p>
-            <a:pPr marL="342900" indent="-342900" algn="just">
-              <a:buFont typeface="Arial" panose="020B0604020202020204" pitchFamily="34" charset="0"/>
-              <a:buChar char="•"/>
+              <a:t>Mode 0: quasi-TE, neff = 1.605248</a:t>
+            </a:r>
+          </a:p>
+          <a:p>
+            <a:pPr algn="l">
+              <a:defRPr sz="1500" b="0"/>
             </a:pPr>
             <a:r>
-              <a:rPr lang="en-US" sz="2000" dirty="0"/>
-              <a:t>Describe the outputs.</a:t>
-            </a:r>
-          </a:p>
-          <a:p>
-            <a:pPr marL="0" indent="0" algn="just">
-              <a:buNone/>
+              <a:t>Mode 1: quasi-TM, neff = 1.528298</a:t>
+            </a:r>
+          </a:p>
+          <a:p>
+            <a:pPr algn="l">
+              <a:defRPr sz="1500" b="0"/>
             </a:pPr>
             <a:r>
-              <a:rPr lang="en-US" sz="2000" b="1" dirty="0"/>
-              <a:t>ALL EXAMPLE #1: </a:t>
-            </a:r>
-            <a:r>
-              <a:rPr lang="en-US" sz="2000" dirty="0"/>
-              <a:t>waveguide width 1.2 µm, deep </a:t>
-            </a:r>
-            <a:r>
-              <a:rPr lang="en-US" sz="2000" dirty="0" err="1"/>
-              <a:t>wvg</a:t>
-            </a:r>
-            <a:r>
-              <a:rPr lang="en-US" sz="2000" dirty="0"/>
-              <a:t>, wavelength start and end same 1.55 µm </a:t>
-            </a:r>
-            <a:r>
-              <a:rPr lang="en-US" sz="2000" dirty="0">
-                <a:sym typeface="Wingdings" pitchFamily="2" charset="2"/>
-              </a:rPr>
-              <a:t> all ”Run”</a:t>
-            </a:r>
-            <a:endParaRPr lang="en-US" sz="2000" dirty="0"/>
-          </a:p>
-          <a:p>
-            <a:pPr marL="0" indent="0" algn="just">
-              <a:buNone/>
+              <a:t>Mode 2: higher-order quasi-TE, neff = 1.450730</a:t>
+            </a:r>
+          </a:p>
+          <a:p>
+            <a:pPr algn="l">
+              <a:defRPr sz="1500" b="0"/>
             </a:pPr>
             <a:r>
-              <a:rPr lang="en-US" sz="2000" b="1" dirty="0"/>
-              <a:t>ALL: </a:t>
-            </a:r>
-            <a:r>
-              <a:rPr lang="en-US" sz="2000" dirty="0"/>
-              <a:t>Follow</a:t>
-            </a:r>
-            <a:r>
-              <a:rPr lang="en-US" sz="2000" b="1" dirty="0"/>
-              <a:t> </a:t>
-            </a:r>
-            <a:r>
-              <a:rPr lang="en-US" sz="2000" dirty="0"/>
-              <a:t>instructor, that will show how to 1) plot mode, 2) explore the results (neff …)</a:t>
-            </a:r>
-          </a:p>
-          <a:p>
-            <a:pPr algn="just"/>
-            <a:endParaRPr lang="en-US" sz="2000" b="1" i="1" dirty="0"/>
-          </a:p>
-          <a:p>
-            <a:pPr algn="just"/>
-            <a:endParaRPr lang="en-US" sz="2000" kern="0" dirty="0">
-              <a:solidFill>
-                <a:sysClr val="windowText" lastClr="000000"/>
-              </a:solidFill>
-            </a:endParaRPr>
+              <a:t>Mode 3: higher-order quasi-TM, neff = 1.433258</a:t>
+            </a:r>
+          </a:p>
+          <a:p>
+            <a:pPr algn="l">
+              <a:defRPr sz="1500" b="0"/>
+            </a:pPr>
+            <a:endParaRPr/>
+          </a:p>
+          <a:p>
+            <a:pPr algn="l">
+              <a:defRPr sz="1500" b="0"/>
+            </a:pPr>
+            <a:r>
+              <a:t>All guided modes stay above the SiO2 index, so the solutions are physically consistent.</a:t>
+            </a:r>
           </a:p>
         </p:txBody>
       </p:sp>
@@ -5155,77 +5104,43 @@
           </a:bodyPr>
           <a:lstStyle/>
           <a:p>
-            <a:pPr algn="just"/>
-            <a:r>
-              <a:rPr lang="en-US" sz="1200" dirty="0">
-                <a:latin typeface="Arial" panose="020B0604020202020204" pitchFamily="34" charset="0"/>
-                <a:cs typeface="Arial" panose="020B0604020202020204" pitchFamily="34" charset="0"/>
-              </a:rPr>
-              <a:t>Document all your results (neff, plot fields </a:t>
-            </a:r>
-            <a:r>
-              <a:rPr lang="en-US" sz="1200">
-                <a:latin typeface="Arial" panose="020B0604020202020204" pitchFamily="34" charset="0"/>
-                <a:cs typeface="Arial" panose="020B0604020202020204" pitchFamily="34" charset="0"/>
-              </a:rPr>
-              <a:t>of different modes, </a:t>
-            </a:r>
-            <a:r>
-              <a:rPr lang="en-US" sz="1200" dirty="0">
-                <a:latin typeface="Arial" panose="020B0604020202020204" pitchFamily="34" charset="0"/>
-                <a:cs typeface="Arial" panose="020B0604020202020204" pitchFamily="34" charset="0"/>
-              </a:rPr>
-              <a:t>comparison between </a:t>
-            </a:r>
-            <a:r>
-              <a:rPr lang="en-US" sz="1200">
-                <a:latin typeface="Arial" panose="020B0604020202020204" pitchFamily="34" charset="0"/>
-                <a:cs typeface="Arial" panose="020B0604020202020204" pitchFamily="34" charset="0"/>
-              </a:rPr>
-              <a:t>different polarizations…)</a:t>
+            <a:pPr algn="l">
+              <a:defRPr sz="1400" b="0"/>
+            </a:pPr>
+            <a:r>
+              <a:t>Mode profiles at lambda = 1.55 um. Quasi-TE branches: modes 0 and 2. Quasi-TM branches: modes 1 and 3.</a:t>
             </a:r>
             <a:endParaRPr lang="en-US" sz="1200" dirty="0">
               <a:latin typeface="Arial" panose="020B0604020202020204" pitchFamily="34" charset="0"/>
               <a:cs typeface="Arial" panose="020B0604020202020204" pitchFamily="34" charset="0"/>
             </a:endParaRPr>
           </a:p>
-          <a:p>
-            <a:pPr algn="just"/>
-            <a:endParaRPr lang="en-US" sz="1200" dirty="0">
-              <a:latin typeface="Arial" panose="020B0604020202020204" pitchFamily="34" charset="0"/>
-              <a:cs typeface="Arial" panose="020B0604020202020204" pitchFamily="34" charset="0"/>
-            </a:endParaRPr>
-          </a:p>
-          <a:p>
-            <a:pPr algn="just"/>
-            <a:endParaRPr lang="en-US" sz="1200" dirty="0">
-              <a:latin typeface="Arial" panose="020B0604020202020204" pitchFamily="34" charset="0"/>
-              <a:cs typeface="Arial" panose="020B0604020202020204" pitchFamily="34" charset="0"/>
-            </a:endParaRPr>
-          </a:p>
-          <a:p>
-            <a:pPr algn="just"/>
-            <a:endParaRPr lang="en-US" sz="1200" dirty="0">
-              <a:latin typeface="Arial" panose="020B0604020202020204" pitchFamily="34" charset="0"/>
-              <a:cs typeface="Arial" panose="020B0604020202020204" pitchFamily="34" charset="0"/>
-            </a:endParaRPr>
-          </a:p>
-          <a:p>
-            <a:pPr algn="just"/>
-            <a:endParaRPr lang="en-US" sz="1200" dirty="0">
-              <a:latin typeface="Arial" panose="020B0604020202020204" pitchFamily="34" charset="0"/>
-              <a:cs typeface="Arial" panose="020B0604020202020204" pitchFamily="34" charset="0"/>
-            </a:endParaRPr>
-          </a:p>
-          <a:p>
-            <a:pPr algn="just"/>
-            <a:endParaRPr lang="en-US" sz="1200" dirty="0">
-              <a:latin typeface="Arial" panose="020B0604020202020204" pitchFamily="34" charset="0"/>
-              <a:cs typeface="Arial" panose="020B0604020202020204" pitchFamily="34" charset="0"/>
-            </a:endParaRPr>
-          </a:p>
-        </p:txBody>
-      </p:sp>
+        </p:txBody>
+      </p:sp>
+      <p:pic>
+        <p:nvPicPr>
+          <p:cNvPr id="85" name="Picture 84" descr="lo1_fields_collage.png"/>
+          <p:cNvPicPr>
+            <a:picLocks noChangeAspect="1"/>
+          </p:cNvPicPr>
+          <p:nvPr/>
+        </p:nvPicPr>
+        <p:blipFill>
+          <a:blip r:embed="rId5"/>
+          <a:stretch>
+            <a:fillRect/>
+          </a:stretch>
+        </p:blipFill>
+        <p:spPr>
+          <a:xfrm>
+            <a:off x="6203221" y="940101"/>
+            <a:ext cx="5440680" cy="3787056"/>
+          </a:xfrm>
+          <a:prstGeom prst="rect">
+            <a:avLst/>
+          </a:prstGeom>
+        </p:spPr>
+      </p:pic>
     </p:spTree>
     <p:extLst>
       <p:ext uri="{BB962C8B-B14F-4D97-AF65-F5344CB8AC3E}">
@@ -5458,63 +5373,28 @@
           </a:bodyPr>
           <a:lstStyle/>
           <a:p>
-            <a:pPr algn="just"/>
-            <a:r>
-              <a:rPr lang="en-US" sz="1200" dirty="0">
-                <a:latin typeface="Arial" panose="020B0604020202020204" pitchFamily="34" charset="0"/>
-                <a:cs typeface="Arial" panose="020B0604020202020204" pitchFamily="34" charset="0"/>
-              </a:rPr>
-              <a:t>Comment results (neff changes this way with wavelength, comparison between different waveguide cross-sections …</a:t>
-            </a:r>
-            <a:r>
-              <a:rPr lang="en-US" sz="1200" dirty="0" err="1">
-                <a:latin typeface="Arial" panose="020B0604020202020204" pitchFamily="34" charset="0"/>
-                <a:cs typeface="Arial" panose="020B0604020202020204" pitchFamily="34" charset="0"/>
-              </a:rPr>
-              <a:t>etc</a:t>
-            </a:r>
-            <a:r>
-              <a:rPr lang="en-US" sz="1200" dirty="0">
-                <a:latin typeface="Arial" panose="020B0604020202020204" pitchFamily="34" charset="0"/>
-                <a:cs typeface="Arial" panose="020B0604020202020204" pitchFamily="34" charset="0"/>
-              </a:rPr>
-              <a:t>)</a:t>
-            </a:r>
-          </a:p>
-          <a:p>
-            <a:pPr algn="just"/>
-            <a:endParaRPr lang="en-US" sz="1200" dirty="0">
-              <a:latin typeface="Arial" panose="020B0604020202020204" pitchFamily="34" charset="0"/>
-              <a:cs typeface="Arial" panose="020B0604020202020204" pitchFamily="34" charset="0"/>
-            </a:endParaRPr>
-          </a:p>
-          <a:p>
-            <a:pPr algn="just"/>
-            <a:endParaRPr lang="en-US" sz="1200" dirty="0">
-              <a:latin typeface="Arial" panose="020B0604020202020204" pitchFamily="34" charset="0"/>
-              <a:cs typeface="Arial" panose="020B0604020202020204" pitchFamily="34" charset="0"/>
-            </a:endParaRPr>
-          </a:p>
-          <a:p>
-            <a:pPr algn="just"/>
-            <a:endParaRPr lang="en-US" sz="1200" dirty="0">
-              <a:latin typeface="Arial" panose="020B0604020202020204" pitchFamily="34" charset="0"/>
-              <a:cs typeface="Arial" panose="020B0604020202020204" pitchFamily="34" charset="0"/>
-            </a:endParaRPr>
-          </a:p>
-          <a:p>
-            <a:pPr algn="just"/>
-            <a:endParaRPr lang="en-US" sz="1200" dirty="0">
-              <a:latin typeface="Arial" panose="020B0604020202020204" pitchFamily="34" charset="0"/>
-              <a:cs typeface="Arial" panose="020B0604020202020204" pitchFamily="34" charset="0"/>
-            </a:endParaRPr>
-          </a:p>
-          <a:p>
-            <a:pPr algn="just"/>
-            <a:endParaRPr lang="en-US" sz="1200" dirty="0">
-              <a:latin typeface="Arial" panose="020B0604020202020204" pitchFamily="34" charset="0"/>
-              <a:cs typeface="Arial" panose="020B0604020202020204" pitchFamily="34" charset="0"/>
-            </a:endParaRPr>
+            <a:pPr algn="l">
+              <a:defRPr sz="1500" b="0"/>
+            </a:pPr>
+            <a:r>
+              <a:t>Both waveguides show a monotonic decrease of neff when wavelength increases from 1.50 to 1.60 um.</a:t>
+            </a:r>
+          </a:p>
+          <a:p>
+            <a:pPr algn="l">
+              <a:defRPr sz="1500" b="0"/>
+            </a:pPr>
+            <a:r>
+              <a:t>The 150 nm slab shifts the dominant branches upward: TE0 goes from 1.6337 to 1.6149 in the shallow guide, versus 1.6160 to 1.5944 in the deep guide.</a:t>
+            </a:r>
+          </a:p>
+          <a:p>
+            <a:pPr algn="l">
+              <a:defRPr sz="1500" b="0"/>
+            </a:pPr>
+            <a:r>
+              <a:t>The shallow geometry also packs the modes more closely together, so polarization mixing is stronger than in the deep rib.</a:t>
+            </a:r>
           </a:p>
         </p:txBody>
       </p:sp>
@@ -5593,31 +5473,15 @@
           <a:noFill/>
         </p:spPr>
         <p:txBody>
-          <a:bodyPr wrap="none" rtlCol="0">
+          <a:bodyPr wrap="square" rtlCol="0">
             <a:spAutoFit/>
           </a:bodyPr>
           <a:lstStyle/>
           <a:p>
-            <a:pPr algn="ctr"/>
-            <a:r>
-              <a:rPr lang="en-US" b="1" dirty="0"/>
-              <a:t>shallow</a:t>
-            </a:r>
-            <a:r>
-              <a:rPr lang="en-US" dirty="0"/>
-              <a:t> waveguide</a:t>
-            </a:r>
-          </a:p>
-          <a:p>
-            <a:pPr algn="ctr"/>
-            <a:endParaRPr lang="en-US" dirty="0"/>
-          </a:p>
-          <a:p>
-            <a:pPr algn="ctr"/>
-            <a:r>
-              <a:rPr lang="en-US" dirty="0"/>
-              <a:t>Paste plot here</a:t>
-            </a:r>
+            <a:pPr algn="l">
+              <a:defRPr sz="100" b="0"/>
+            </a:pPr>
+            <a:endParaRPr/>
           </a:p>
         </p:txBody>
       </p:sp>
@@ -5696,74 +5560,78 @@
           <a:noFill/>
         </p:spPr>
         <p:txBody>
-          <a:bodyPr wrap="none" rtlCol="0">
+          <a:bodyPr wrap="square" rtlCol="0">
             <a:spAutoFit/>
           </a:bodyPr>
           <a:lstStyle/>
           <a:p>
-            <a:pPr algn="ctr"/>
-            <a:r>
-              <a:rPr lang="en-US" b="1" dirty="0"/>
-              <a:t>deep</a:t>
-            </a:r>
-            <a:r>
-              <a:rPr lang="en-US" dirty="0"/>
-              <a:t> waveguide</a:t>
-            </a:r>
-          </a:p>
-          <a:p>
-            <a:pPr algn="ctr"/>
-            <a:endParaRPr lang="en-US" dirty="0"/>
-          </a:p>
-          <a:p>
-            <a:pPr algn="ctr"/>
-            <a:r>
-              <a:rPr lang="en-US" dirty="0"/>
-              <a:t>Paste plot here</a:t>
-            </a:r>
-          </a:p>
-        </p:txBody>
-      </p:sp>
-      <p:sp>
-        <p:nvSpPr>
-          <p:cNvPr id="9" name="CuadroTexto 8">
-            <a:extLst>
-              <a:ext uri="{FF2B5EF4-FFF2-40B4-BE49-F238E27FC236}">
-                <a16:creationId xmlns:a16="http://schemas.microsoft.com/office/drawing/2014/main" id="{8BD4C233-B5D9-B6AA-93A8-CF2F130CFF9C}"/>
-              </a:ext>
-            </a:extLst>
-          </p:cNvPr>
-          <p:cNvSpPr txBox="1"/>
+            <a:pPr algn="l">
+              <a:defRPr sz="100" b="0"/>
+            </a:pPr>
+            <a:endParaRPr/>
+          </a:p>
+        </p:txBody>
+      </p:sp>
+      <p:pic>
+        <p:nvPicPr>
+          <p:cNvPr id="12" name="Imagen 11">
+            <a:extLst>
+              <a:ext uri="{FF2B5EF4-FFF2-40B4-BE49-F238E27FC236}">
+                <a16:creationId xmlns:a16="http://schemas.microsoft.com/office/drawing/2014/main" id="{4E9943C8-7D57-835F-682C-1EF314140C35}"/>
+              </a:ext>
+            </a:extLst>
+          </p:cNvPr>
+          <p:cNvPicPr>
+            <a:picLocks noChangeAspect="1"/>
+          </p:cNvPicPr>
           <p:nvPr/>
-        </p:nvSpPr>
-        <p:spPr>
-          <a:xfrm>
-            <a:off x="642989" y="4402885"/>
-            <a:ext cx="2269787" cy="369332"/>
+        </p:nvPicPr>
+        <p:blipFill>
+          <a:blip r:embed="rId5"/>
+          <a:stretch>
+            <a:fillRect/>
+          </a:stretch>
+        </p:blipFill>
+        <p:spPr>
+          <a:xfrm>
+            <a:off x="6588338" y="1562471"/>
+            <a:ext cx="5109576" cy="2980586"/>
           </a:xfrm>
           <a:prstGeom prst="rect">
             <a:avLst/>
           </a:prstGeom>
-          <a:noFill/>
-        </p:spPr>
-        <p:txBody>
-          <a:bodyPr wrap="square">
-            <a:spAutoFit/>
-          </a:bodyPr>
-          <a:lstStyle/>
-          <a:p>
-            <a:r>
-              <a:rPr lang="en-US"/>
-              <a:t>slab </a:t>
-            </a:r>
-            <a:r>
-              <a:rPr lang="en-US" dirty="0"/>
-              <a:t>= 150nm</a:t>
-            </a:r>
-            <a:endParaRPr lang="es-ES" dirty="0"/>
-          </a:p>
-        </p:txBody>
-      </p:sp>
+        </p:spPr>
+      </p:pic>
+      <p:pic>
+        <p:nvPicPr>
+          <p:cNvPr id="14" name="Imagen 13">
+            <a:extLst>
+              <a:ext uri="{FF2B5EF4-FFF2-40B4-BE49-F238E27FC236}">
+                <a16:creationId xmlns:a16="http://schemas.microsoft.com/office/drawing/2014/main" id="{A62EAA56-6221-FC03-3394-A609C2D53046}"/>
+              </a:ext>
+            </a:extLst>
+          </p:cNvPr>
+          <p:cNvPicPr>
+            <a:picLocks noChangeAspect="1"/>
+          </p:cNvPicPr>
+          <p:nvPr/>
+        </p:nvPicPr>
+        <p:blipFill>
+          <a:blip r:embed="rId6"/>
+          <a:stretch>
+            <a:fillRect/>
+          </a:stretch>
+        </p:blipFill>
+        <p:spPr>
+          <a:xfrm>
+            <a:off x="811909" y="1570578"/>
+            <a:ext cx="5081781" cy="2964372"/>
+          </a:xfrm>
+          <a:prstGeom prst="rect">
+            <a:avLst/>
+          </a:prstGeom>
+        </p:spPr>
+      </p:pic>
     </p:spTree>
     <p:extLst>
       <p:ext uri="{BB962C8B-B14F-4D97-AF65-F5344CB8AC3E}">
@@ -5996,63 +5864,39 @@
           </a:bodyPr>
           <a:lstStyle/>
           <a:p>
-            <a:pPr algn="just"/>
-            <a:r>
-              <a:rPr lang="en-US" sz="1200" dirty="0">
-                <a:latin typeface="Arial" panose="020B0604020202020204" pitchFamily="34" charset="0"/>
-                <a:cs typeface="Arial" panose="020B0604020202020204" pitchFamily="34" charset="0"/>
-              </a:rPr>
-              <a:t>Comment results (neff changes this way with width, polarization behavior, </a:t>
-            </a:r>
-            <a:r>
-              <a:rPr lang="en-US" sz="1200" dirty="0" err="1">
-                <a:latin typeface="Arial" panose="020B0604020202020204" pitchFamily="34" charset="0"/>
-                <a:cs typeface="Arial" panose="020B0604020202020204" pitchFamily="34" charset="0"/>
-              </a:rPr>
-              <a:t>etc</a:t>
-            </a:r>
-            <a:r>
-              <a:rPr lang="en-US" sz="1200" dirty="0">
-                <a:latin typeface="Arial" panose="020B0604020202020204" pitchFamily="34" charset="0"/>
-                <a:cs typeface="Arial" panose="020B0604020202020204" pitchFamily="34" charset="0"/>
-              </a:rPr>
-              <a:t>…)</a:t>
-            </a:r>
-          </a:p>
-          <a:p>
-            <a:pPr algn="just"/>
-            <a:endParaRPr lang="en-US" sz="1200" dirty="0">
-              <a:latin typeface="Arial" panose="020B0604020202020204" pitchFamily="34" charset="0"/>
-              <a:cs typeface="Arial" panose="020B0604020202020204" pitchFamily="34" charset="0"/>
-            </a:endParaRPr>
-          </a:p>
-          <a:p>
-            <a:pPr algn="just"/>
-            <a:endParaRPr lang="en-US" sz="1200" dirty="0">
-              <a:latin typeface="Arial" panose="020B0604020202020204" pitchFamily="34" charset="0"/>
-              <a:cs typeface="Arial" panose="020B0604020202020204" pitchFamily="34" charset="0"/>
-            </a:endParaRPr>
-          </a:p>
-          <a:p>
-            <a:pPr algn="just"/>
-            <a:endParaRPr lang="en-US" sz="1200" dirty="0">
-              <a:latin typeface="Arial" panose="020B0604020202020204" pitchFamily="34" charset="0"/>
-              <a:cs typeface="Arial" panose="020B0604020202020204" pitchFamily="34" charset="0"/>
-            </a:endParaRPr>
-          </a:p>
-          <a:p>
-            <a:pPr algn="just"/>
-            <a:endParaRPr lang="en-US" sz="1200" dirty="0">
-              <a:latin typeface="Arial" panose="020B0604020202020204" pitchFamily="34" charset="0"/>
-              <a:cs typeface="Arial" panose="020B0604020202020204" pitchFamily="34" charset="0"/>
-            </a:endParaRPr>
-          </a:p>
-          <a:p>
-            <a:pPr algn="just"/>
-            <a:endParaRPr lang="en-US" sz="1200" dirty="0">
-              <a:latin typeface="Arial" panose="020B0604020202020204" pitchFamily="34" charset="0"/>
-              <a:cs typeface="Arial" panose="020B0604020202020204" pitchFamily="34" charset="0"/>
-            </a:endParaRPr>
+            <a:pPr algn="l">
+              <a:defRPr sz="1500" b="0"/>
+            </a:pPr>
+            <a:r>
+              <a:rPr dirty="0"/>
+              <a:t>Increasing width raises modal confinement and moves the fundamental branch from </a:t>
+            </a:r>
+            <a:r>
+              <a:rPr dirty="0" err="1"/>
+              <a:t>neff</a:t>
+            </a:r>
+            <a:r>
+              <a:rPr dirty="0"/>
+              <a:t> = 1.5117 at 0.6 um to 1.6324 at 1.6 um.</a:t>
+            </a:r>
+          </a:p>
+          <a:p>
+            <a:pPr algn="l">
+              <a:defRPr sz="1500" b="0"/>
+            </a:pPr>
+            <a:r>
+              <a:rPr dirty="0"/>
+              <a:t>Mode 1 is already guided at the narrowest widths, while additional branches appear around 1.2 um (mode 2) and 1.6 um (mode 3).</a:t>
+            </a:r>
+          </a:p>
+          <a:p>
+            <a:pPr algn="l">
+              <a:defRPr sz="1500" b="0"/>
+            </a:pPr>
+            <a:r>
+              <a:rPr dirty="0"/>
+              <a:t>The color scale confirms the expected polarization pattern: modes 0 and 2 are TE-like, whereas modes 1 and 3 are TM-like.</a:t>
+            </a:r>
           </a:p>
         </p:txBody>
       </p:sp>
@@ -6136,29 +5980,43 @@
           </a:bodyPr>
           <a:lstStyle/>
           <a:p>
-            <a:pPr algn="ctr"/>
-            <a:r>
-              <a:rPr lang="en-US" b="1" dirty="0"/>
-              <a:t>deep</a:t>
-            </a:r>
-            <a:r>
-              <a:rPr lang="en-US" dirty="0"/>
-              <a:t> waveguide</a:t>
-            </a:r>
-          </a:p>
-          <a:p>
-            <a:pPr algn="ctr"/>
-            <a:endParaRPr lang="en-US" dirty="0"/>
-          </a:p>
-          <a:p>
-            <a:pPr algn="ctr"/>
-            <a:r>
-              <a:rPr lang="en-US" dirty="0"/>
-              <a:t>Paste plot here</a:t>
-            </a:r>
-          </a:p>
-        </p:txBody>
-      </p:sp>
+            <a:pPr algn="l">
+              <a:defRPr sz="100" b="0"/>
+            </a:pPr>
+            <a:endParaRPr/>
+          </a:p>
+        </p:txBody>
+      </p:sp>
+      <p:pic>
+        <p:nvPicPr>
+          <p:cNvPr id="5" name="Imagen 4">
+            <a:extLst>
+              <a:ext uri="{FF2B5EF4-FFF2-40B4-BE49-F238E27FC236}">
+                <a16:creationId xmlns:a16="http://schemas.microsoft.com/office/drawing/2014/main" id="{EE0875AF-2443-0475-F504-D1C2B8911A0C}"/>
+              </a:ext>
+            </a:extLst>
+          </p:cNvPr>
+          <p:cNvPicPr>
+            <a:picLocks noChangeAspect="1"/>
+          </p:cNvPicPr>
+          <p:nvPr/>
+        </p:nvPicPr>
+        <p:blipFill>
+          <a:blip r:embed="rId5"/>
+          <a:stretch>
+            <a:fillRect/>
+          </a:stretch>
+        </p:blipFill>
+        <p:spPr>
+          <a:xfrm>
+            <a:off x="3409950" y="1565391"/>
+            <a:ext cx="5372100" cy="3127330"/>
+          </a:xfrm>
+          <a:prstGeom prst="rect">
+            <a:avLst/>
+          </a:prstGeom>
+        </p:spPr>
+      </p:pic>
     </p:spTree>
     <p:extLst>
       <p:ext uri="{BB962C8B-B14F-4D97-AF65-F5344CB8AC3E}">
@@ -6376,522 +6234,55 @@
           </a:p>
         </p:txBody>
       </p:sp>
-      <mc:AlternateContent xmlns:mc="http://schemas.openxmlformats.org/markup-compatibility/2006" xmlns:a14="http://schemas.microsoft.com/office/drawing/2010/main">
-        <mc:Choice Requires="a14">
-          <p:sp>
-            <p:nvSpPr>
-              <p:cNvPr id="2" name="CuadroTexto 1">
-                <a:extLst>
-                  <a:ext uri="{FF2B5EF4-FFF2-40B4-BE49-F238E27FC236}">
-                    <a16:creationId xmlns:a16="http://schemas.microsoft.com/office/drawing/2014/main" id="{A440F587-93A3-E474-C0B0-883BB9DAFD85}"/>
-                  </a:ext>
-                </a:extLst>
-              </p:cNvPr>
-              <p:cNvSpPr txBox="1"/>
-              <p:nvPr/>
-            </p:nvSpPr>
-            <p:spPr>
-              <a:xfrm>
-                <a:off x="609441" y="4860334"/>
-                <a:ext cx="11198542" cy="1361911"/>
-              </a:xfrm>
-              <a:prstGeom prst="rect">
-                <a:avLst/>
-              </a:prstGeom>
-              <a:solidFill>
-                <a:schemeClr val="bg1">
-                  <a:lumMod val="95000"/>
-                </a:schemeClr>
-              </a:solidFill>
-              <a:ln w="28575">
-                <a:solidFill>
-                  <a:srgbClr val="E0700D"/>
-                </a:solidFill>
-              </a:ln>
-            </p:spPr>
-            <p:txBody>
-              <a:bodyPr wrap="square" rtlCol="0">
-                <a:spAutoFit/>
-              </a:bodyPr>
-              <a:lstStyle/>
-              <a:p>
-                <a:pPr algn="just"/>
-                <a:r>
-                  <a:rPr lang="en-US" sz="1200" dirty="0">
-                    <a:latin typeface="Arial" panose="020B0604020202020204" pitchFamily="34" charset="0"/>
-                    <a:cs typeface="Arial" panose="020B0604020202020204" pitchFamily="34" charset="0"/>
-                  </a:rPr>
-                  <a:t>Find the second-degree polynomial coefficients and relate them with the group index and the dispersion parameter. </a:t>
-                </a:r>
-                <a14:m>
-                  <m:oMath xmlns:m="http://schemas.openxmlformats.org/officeDocument/2006/math">
-                    <m:d>
-                      <m:dPr>
-                        <m:begChr m:val="{"/>
-                        <m:endChr m:val=""/>
-                        <m:ctrlPr>
-                          <a:rPr lang="es-ES" sz="1200" b="0" i="1" smtClean="0">
-                            <a:latin typeface="Cambria Math" panose="02040503050406030204" pitchFamily="18" charset="0"/>
-                            <a:cs typeface="Arial" panose="020B0604020202020204" pitchFamily="34" charset="0"/>
-                          </a:rPr>
-                        </m:ctrlPr>
-                      </m:dPr>
-                      <m:e>
-                        <m:eqArr>
-                          <m:eqArrPr>
-                            <m:ctrlPr>
-                              <a:rPr lang="es-ES" sz="1200" b="0" i="1" smtClean="0">
-                                <a:latin typeface="Cambria Math" panose="02040503050406030204" pitchFamily="18" charset="0"/>
-                                <a:cs typeface="Arial" panose="020B0604020202020204" pitchFamily="34" charset="0"/>
-                              </a:rPr>
-                            </m:ctrlPr>
-                          </m:eqArrPr>
-                          <m:e>
-                            <m:sSub>
-                              <m:sSubPr>
-                                <m:ctrlPr>
-                                  <a:rPr lang="es-ES" sz="1200" b="0" i="1" smtClean="0">
-                                    <a:latin typeface="Cambria Math" panose="02040503050406030204" pitchFamily="18" charset="0"/>
-                                    <a:cs typeface="Arial" panose="020B0604020202020204" pitchFamily="34" charset="0"/>
-                                  </a:rPr>
-                                </m:ctrlPr>
-                              </m:sSubPr>
-                              <m:e>
-                                <m:r>
-                                  <a:rPr lang="es-ES" sz="1200" b="0" i="1" smtClean="0">
-                                    <a:latin typeface="Cambria Math" panose="02040503050406030204" pitchFamily="18" charset="0"/>
-                                    <a:cs typeface="Arial" panose="020B0604020202020204" pitchFamily="34" charset="0"/>
-                                  </a:rPr>
-                                  <m:t>𝑛</m:t>
-                                </m:r>
-                              </m:e>
-                              <m:sub>
-                                <m:r>
-                                  <a:rPr lang="es-ES" sz="1200" b="0" i="1" smtClean="0">
-                                    <a:latin typeface="Cambria Math" panose="02040503050406030204" pitchFamily="18" charset="0"/>
-                                    <a:cs typeface="Arial" panose="020B0604020202020204" pitchFamily="34" charset="0"/>
-                                  </a:rPr>
-                                  <m:t>𝑒𝑓𝑓</m:t>
-                                </m:r>
-                              </m:sub>
-                            </m:sSub>
-                            <m:r>
-                              <a:rPr lang="es-ES" sz="1200" b="0" i="1" smtClean="0">
-                                <a:latin typeface="Cambria Math" panose="02040503050406030204" pitchFamily="18" charset="0"/>
-                                <a:cs typeface="Arial" panose="020B0604020202020204" pitchFamily="34" charset="0"/>
-                              </a:rPr>
-                              <m:t>=</m:t>
-                            </m:r>
-                            <m:sSub>
-                              <m:sSubPr>
-                                <m:ctrlPr>
-                                  <a:rPr lang="es-ES" sz="1200" b="0" i="1" smtClean="0">
-                                    <a:latin typeface="Cambria Math" panose="02040503050406030204" pitchFamily="18" charset="0"/>
-                                    <a:cs typeface="Arial" panose="020B0604020202020204" pitchFamily="34" charset="0"/>
-                                  </a:rPr>
-                                </m:ctrlPr>
-                              </m:sSubPr>
-                              <m:e>
-                                <m:r>
-                                  <a:rPr lang="es-ES" sz="1200" b="0" i="1" smtClean="0">
-                                    <a:latin typeface="Cambria Math" panose="02040503050406030204" pitchFamily="18" charset="0"/>
-                                    <a:cs typeface="Arial" panose="020B0604020202020204" pitchFamily="34" charset="0"/>
-                                  </a:rPr>
-                                  <m:t>𝑛</m:t>
-                                </m:r>
-                              </m:e>
-                              <m:sub>
-                                <m:r>
-                                  <a:rPr lang="es-ES" sz="1200" b="0" i="1" smtClean="0">
-                                    <a:latin typeface="Cambria Math" panose="02040503050406030204" pitchFamily="18" charset="0"/>
-                                    <a:cs typeface="Arial" panose="020B0604020202020204" pitchFamily="34" charset="0"/>
-                                  </a:rPr>
-                                  <m:t>1</m:t>
-                                </m:r>
-                              </m:sub>
-                            </m:sSub>
-                          </m:e>
-                          <m:e>
-                            <m:sSub>
-                              <m:sSubPr>
-                                <m:ctrlPr>
-                                  <a:rPr lang="es-ES" sz="1200" b="0" i="1" smtClean="0">
-                                    <a:latin typeface="Cambria Math" panose="02040503050406030204" pitchFamily="18" charset="0"/>
-                                    <a:cs typeface="Arial" panose="020B0604020202020204" pitchFamily="34" charset="0"/>
-                                  </a:rPr>
-                                </m:ctrlPr>
-                              </m:sSubPr>
-                              <m:e>
-                                <m:r>
-                                  <a:rPr lang="es-ES" sz="1200" b="0" i="1" smtClean="0">
-                                    <a:latin typeface="Cambria Math" panose="02040503050406030204" pitchFamily="18" charset="0"/>
-                                    <a:cs typeface="Arial" panose="020B0604020202020204" pitchFamily="34" charset="0"/>
-                                  </a:rPr>
-                                  <m:t>𝑛</m:t>
-                                </m:r>
-                              </m:e>
-                              <m:sub>
-                                <m:r>
-                                  <a:rPr lang="es-ES" sz="1200" b="0" i="1" smtClean="0">
-                                    <a:latin typeface="Cambria Math" panose="02040503050406030204" pitchFamily="18" charset="0"/>
-                                    <a:cs typeface="Arial" panose="020B0604020202020204" pitchFamily="34" charset="0"/>
-                                  </a:rPr>
-                                  <m:t>𝑔</m:t>
-                                </m:r>
-                              </m:sub>
-                            </m:sSub>
-                            <m:r>
-                              <a:rPr lang="es-ES" sz="1200" b="0" i="1" smtClean="0">
-                                <a:latin typeface="Cambria Math" panose="02040503050406030204" pitchFamily="18" charset="0"/>
-                                <a:cs typeface="Arial" panose="020B0604020202020204" pitchFamily="34" charset="0"/>
-                              </a:rPr>
-                              <m:t>=</m:t>
-                            </m:r>
-                            <m:sSub>
-                              <m:sSubPr>
-                                <m:ctrlPr>
-                                  <a:rPr lang="es-ES" sz="1200" b="0" i="1" smtClean="0">
-                                    <a:latin typeface="Cambria Math" panose="02040503050406030204" pitchFamily="18" charset="0"/>
-                                    <a:cs typeface="Arial" panose="020B0604020202020204" pitchFamily="34" charset="0"/>
-                                  </a:rPr>
-                                </m:ctrlPr>
-                              </m:sSubPr>
-                              <m:e>
-                                <m:r>
-                                  <a:rPr lang="es-ES" sz="1200" b="0" i="1" smtClean="0">
-                                    <a:latin typeface="Cambria Math" panose="02040503050406030204" pitchFamily="18" charset="0"/>
-                                    <a:cs typeface="Arial" panose="020B0604020202020204" pitchFamily="34" charset="0"/>
-                                  </a:rPr>
-                                  <m:t>𝑛</m:t>
-                                </m:r>
-                              </m:e>
-                              <m:sub>
-                                <m:r>
-                                  <a:rPr lang="es-ES" sz="1200" b="0" i="1" smtClean="0">
-                                    <a:latin typeface="Cambria Math" panose="02040503050406030204" pitchFamily="18" charset="0"/>
-                                    <a:cs typeface="Arial" panose="020B0604020202020204" pitchFamily="34" charset="0"/>
-                                  </a:rPr>
-                                  <m:t>1</m:t>
-                                </m:r>
-                              </m:sub>
-                            </m:sSub>
-                            <m:r>
-                              <a:rPr lang="es-ES" sz="1200" b="0" i="1" smtClean="0">
-                                <a:latin typeface="Cambria Math" panose="02040503050406030204" pitchFamily="18" charset="0"/>
-                                <a:cs typeface="Arial" panose="020B0604020202020204" pitchFamily="34" charset="0"/>
-                              </a:rPr>
-                              <m:t>−</m:t>
-                            </m:r>
-                            <m:sSub>
-                              <m:sSubPr>
-                                <m:ctrlPr>
-                                  <a:rPr lang="es-ES" sz="1200" b="0" i="1" smtClean="0">
-                                    <a:latin typeface="Cambria Math" panose="02040503050406030204" pitchFamily="18" charset="0"/>
-                                    <a:cs typeface="Arial" panose="020B0604020202020204" pitchFamily="34" charset="0"/>
-                                  </a:rPr>
-                                </m:ctrlPr>
-                              </m:sSubPr>
-                              <m:e>
-                                <m:r>
-                                  <a:rPr lang="es-ES" sz="1200" b="0" i="1" smtClean="0">
-                                    <a:latin typeface="Cambria Math" panose="02040503050406030204" pitchFamily="18" charset="0"/>
-                                    <a:cs typeface="Arial" panose="020B0604020202020204" pitchFamily="34" charset="0"/>
-                                  </a:rPr>
-                                  <m:t>𝑛</m:t>
-                                </m:r>
-                              </m:e>
-                              <m:sub>
-                                <m:r>
-                                  <a:rPr lang="es-ES" sz="1200" b="0" i="1" smtClean="0">
-                                    <a:latin typeface="Cambria Math" panose="02040503050406030204" pitchFamily="18" charset="0"/>
-                                    <a:cs typeface="Arial" panose="020B0604020202020204" pitchFamily="34" charset="0"/>
-                                  </a:rPr>
-                                  <m:t>2</m:t>
-                                </m:r>
-                              </m:sub>
-                            </m:sSub>
-                            <m:sSub>
-                              <m:sSubPr>
-                                <m:ctrlPr>
-                                  <a:rPr lang="es-ES" sz="1200" b="0" i="1" smtClean="0">
-                                    <a:latin typeface="Cambria Math" panose="02040503050406030204" pitchFamily="18" charset="0"/>
-                                    <a:cs typeface="Arial" panose="020B0604020202020204" pitchFamily="34" charset="0"/>
-                                  </a:rPr>
-                                </m:ctrlPr>
-                              </m:sSubPr>
-                              <m:e>
-                                <m:r>
-                                  <a:rPr lang="es-ES" sz="1200" b="0" i="1" smtClean="0">
-                                    <a:latin typeface="Cambria Math" panose="02040503050406030204" pitchFamily="18" charset="0"/>
-                                    <a:cs typeface="Arial" panose="020B0604020202020204" pitchFamily="34" charset="0"/>
-                                  </a:rPr>
-                                  <m:t>𝜆</m:t>
-                                </m:r>
-                              </m:e>
-                              <m:sub>
-                                <m:r>
-                                  <a:rPr lang="es-ES" sz="1200" b="0" i="1" smtClean="0">
-                                    <a:latin typeface="Cambria Math" panose="02040503050406030204" pitchFamily="18" charset="0"/>
-                                    <a:cs typeface="Arial" panose="020B0604020202020204" pitchFamily="34" charset="0"/>
-                                  </a:rPr>
-                                  <m:t>0</m:t>
-                                </m:r>
-                              </m:sub>
-                            </m:sSub>
-                          </m:e>
-                          <m:e>
-                            <m:r>
-                              <a:rPr lang="es-ES" sz="1200" b="0" i="1" smtClean="0">
-                                <a:latin typeface="Cambria Math" panose="02040503050406030204" pitchFamily="18" charset="0"/>
-                                <a:cs typeface="Arial" panose="020B0604020202020204" pitchFamily="34" charset="0"/>
-                              </a:rPr>
-                              <m:t>𝐷</m:t>
-                            </m:r>
-                            <m:r>
-                              <a:rPr lang="es-ES" sz="1200" b="0" i="1" smtClean="0">
-                                <a:latin typeface="Cambria Math" panose="02040503050406030204" pitchFamily="18" charset="0"/>
-                                <a:cs typeface="Arial" panose="020B0604020202020204" pitchFamily="34" charset="0"/>
-                              </a:rPr>
-                              <m:t>=−</m:t>
-                            </m:r>
-                            <m:f>
-                              <m:fPr>
-                                <m:ctrlPr>
-                                  <a:rPr lang="es-ES" sz="1200" b="0" i="1" smtClean="0">
-                                    <a:latin typeface="Cambria Math" panose="02040503050406030204" pitchFamily="18" charset="0"/>
-                                    <a:cs typeface="Arial" panose="020B0604020202020204" pitchFamily="34" charset="0"/>
-                                  </a:rPr>
-                                </m:ctrlPr>
-                              </m:fPr>
-                              <m:num>
-                                <m:r>
-                                  <a:rPr lang="es-ES" sz="1200" b="0" i="1" smtClean="0">
-                                    <a:latin typeface="Cambria Math" panose="02040503050406030204" pitchFamily="18" charset="0"/>
-                                    <a:cs typeface="Arial" panose="020B0604020202020204" pitchFamily="34" charset="0"/>
-                                  </a:rPr>
-                                  <m:t>2</m:t>
-                                </m:r>
-                                <m:sSub>
-                                  <m:sSubPr>
-                                    <m:ctrlPr>
-                                      <a:rPr lang="es-ES" sz="1200" b="0" i="1" smtClean="0">
-                                        <a:latin typeface="Cambria Math" panose="02040503050406030204" pitchFamily="18" charset="0"/>
-                                        <a:cs typeface="Arial" panose="020B0604020202020204" pitchFamily="34" charset="0"/>
-                                      </a:rPr>
-                                    </m:ctrlPr>
-                                  </m:sSubPr>
-                                  <m:e>
-                                    <m:r>
-                                      <a:rPr lang="es-ES" sz="1200" b="0" i="1" smtClean="0">
-                                        <a:latin typeface="Cambria Math" panose="02040503050406030204" pitchFamily="18" charset="0"/>
-                                        <a:cs typeface="Arial" panose="020B0604020202020204" pitchFamily="34" charset="0"/>
-                                      </a:rPr>
-                                      <m:t>𝜆</m:t>
-                                    </m:r>
-                                  </m:e>
-                                  <m:sub>
-                                    <m:r>
-                                      <a:rPr lang="es-ES" sz="1200" b="0" i="1" smtClean="0">
-                                        <a:latin typeface="Cambria Math" panose="02040503050406030204" pitchFamily="18" charset="0"/>
-                                        <a:cs typeface="Arial" panose="020B0604020202020204" pitchFamily="34" charset="0"/>
-                                      </a:rPr>
-                                      <m:t>0</m:t>
-                                    </m:r>
-                                  </m:sub>
-                                </m:sSub>
-                                <m:sSub>
-                                  <m:sSubPr>
-                                    <m:ctrlPr>
-                                      <a:rPr lang="es-ES" sz="1200" b="0" i="1" smtClean="0">
-                                        <a:latin typeface="Cambria Math" panose="02040503050406030204" pitchFamily="18" charset="0"/>
-                                        <a:cs typeface="Arial" panose="020B0604020202020204" pitchFamily="34" charset="0"/>
-                                      </a:rPr>
-                                    </m:ctrlPr>
-                                  </m:sSubPr>
-                                  <m:e>
-                                    <m:r>
-                                      <a:rPr lang="es-ES" sz="1200" b="0" i="1" smtClean="0">
-                                        <a:latin typeface="Cambria Math" panose="02040503050406030204" pitchFamily="18" charset="0"/>
-                                        <a:cs typeface="Arial" panose="020B0604020202020204" pitchFamily="34" charset="0"/>
-                                      </a:rPr>
-                                      <m:t>𝑛</m:t>
-                                    </m:r>
-                                  </m:e>
-                                  <m:sub>
-                                    <m:r>
-                                      <a:rPr lang="es-ES" sz="1200" b="0" i="1" smtClean="0">
-                                        <a:latin typeface="Cambria Math" panose="02040503050406030204" pitchFamily="18" charset="0"/>
-                                        <a:cs typeface="Arial" panose="020B0604020202020204" pitchFamily="34" charset="0"/>
-                                      </a:rPr>
-                                      <m:t>3</m:t>
-                                    </m:r>
-                                  </m:sub>
-                                </m:sSub>
-                              </m:num>
-                              <m:den>
-                                <m:r>
-                                  <a:rPr lang="es-ES" sz="1200" b="0" i="1" smtClean="0">
-                                    <a:latin typeface="Cambria Math" panose="02040503050406030204" pitchFamily="18" charset="0"/>
-                                    <a:cs typeface="Arial" panose="020B0604020202020204" pitchFamily="34" charset="0"/>
-                                  </a:rPr>
-                                  <m:t>𝑐</m:t>
-                                </m:r>
-                              </m:den>
-                            </m:f>
-                            <m:d>
-                              <m:dPr>
-                                <m:begChr m:val="["/>
-                                <m:endChr m:val="]"/>
-                                <m:ctrlPr>
-                                  <a:rPr lang="es-ES" sz="1200" b="0" i="1" smtClean="0">
-                                    <a:latin typeface="Cambria Math" panose="02040503050406030204" pitchFamily="18" charset="0"/>
-                                    <a:cs typeface="Arial" panose="020B0604020202020204" pitchFamily="34" charset="0"/>
-                                  </a:rPr>
-                                </m:ctrlPr>
-                              </m:dPr>
-                              <m:e>
-                                <m:f>
-                                  <m:fPr>
-                                    <m:ctrlPr>
-                                      <a:rPr lang="es-ES" sz="1200" b="0" i="1" smtClean="0">
-                                        <a:latin typeface="Cambria Math" panose="02040503050406030204" pitchFamily="18" charset="0"/>
-                                        <a:cs typeface="Arial" panose="020B0604020202020204" pitchFamily="34" charset="0"/>
-                                      </a:rPr>
-                                    </m:ctrlPr>
-                                  </m:fPr>
-                                  <m:num>
-                                    <m:sSup>
-                                      <m:sSupPr>
-                                        <m:ctrlPr>
-                                          <a:rPr lang="es-ES" sz="1200" b="0" i="1" smtClean="0">
-                                            <a:latin typeface="Cambria Math" panose="02040503050406030204" pitchFamily="18" charset="0"/>
-                                            <a:cs typeface="Arial" panose="020B0604020202020204" pitchFamily="34" charset="0"/>
-                                          </a:rPr>
-                                        </m:ctrlPr>
-                                      </m:sSupPr>
-                                      <m:e>
-                                        <m:r>
-                                          <a:rPr lang="es-ES" sz="1200" b="0" i="1" smtClean="0">
-                                            <a:latin typeface="Cambria Math" panose="02040503050406030204" pitchFamily="18" charset="0"/>
-                                            <a:cs typeface="Arial" panose="020B0604020202020204" pitchFamily="34" charset="0"/>
-                                          </a:rPr>
-                                          <m:t>𝑠</m:t>
-                                        </m:r>
-                                      </m:e>
-                                      <m:sup>
-                                        <m:r>
-                                          <a:rPr lang="es-ES" sz="1200" b="0" i="1" smtClean="0">
-                                            <a:latin typeface="Cambria Math" panose="02040503050406030204" pitchFamily="18" charset="0"/>
-                                            <a:cs typeface="Arial" panose="020B0604020202020204" pitchFamily="34" charset="0"/>
-                                          </a:rPr>
-                                          <m:t>2</m:t>
-                                        </m:r>
-                                      </m:sup>
-                                    </m:sSup>
-                                  </m:num>
-                                  <m:den>
-                                    <m:r>
-                                      <a:rPr lang="es-ES" sz="1200" b="0" i="1" smtClean="0">
-                                        <a:latin typeface="Cambria Math" panose="02040503050406030204" pitchFamily="18" charset="0"/>
-                                        <a:cs typeface="Arial" panose="020B0604020202020204" pitchFamily="34" charset="0"/>
-                                      </a:rPr>
-                                      <m:t>𝑚</m:t>
-                                    </m:r>
-                                  </m:den>
-                                </m:f>
-                              </m:e>
-                            </m:d>
-                          </m:e>
-                        </m:eqArr>
-                      </m:e>
-                    </m:d>
-                  </m:oMath>
-                </a14:m>
-                <a:endParaRPr lang="es-ES" sz="1200" b="0" dirty="0">
-                  <a:latin typeface="Arial" panose="020B0604020202020204" pitchFamily="34" charset="0"/>
-                  <a:cs typeface="Arial" panose="020B0604020202020204" pitchFamily="34" charset="0"/>
-                </a:endParaRPr>
-              </a:p>
-              <a:p>
-                <a:pPr algn="just"/>
-                <a:r>
-                  <a:rPr lang="en-US" sz="1200" dirty="0">
-                    <a:latin typeface="Arial" panose="020B0604020202020204" pitchFamily="34" charset="0"/>
-                    <a:cs typeface="Arial" panose="020B0604020202020204" pitchFamily="34" charset="0"/>
-                  </a:rPr>
-                  <a:t> </a:t>
-                </a:r>
-              </a:p>
-              <a:p>
-                <a:pPr algn="just"/>
-                <a:r>
-                  <a:rPr lang="en-US" sz="1200" dirty="0">
-                    <a:latin typeface="Arial" panose="020B0604020202020204" pitchFamily="34" charset="0"/>
-                    <a:cs typeface="Arial" panose="020B0604020202020204" pitchFamily="34" charset="0"/>
-                  </a:rPr>
-                  <a:t>Comment on the results found for the TE0 and TM0 for both deep and shallow waveguides. </a:t>
-                </a:r>
-              </a:p>
-              <a:p>
-                <a:pPr algn="just"/>
-                <a:endParaRPr lang="en-US" sz="1200" dirty="0">
-                  <a:latin typeface="Arial" panose="020B0604020202020204" pitchFamily="34" charset="0"/>
-                  <a:cs typeface="Arial" panose="020B0604020202020204" pitchFamily="34" charset="0"/>
-                </a:endParaRPr>
-              </a:p>
-            </p:txBody>
-          </p:sp>
-        </mc:Choice>
-        <mc:Fallback xmlns="">
-          <p:sp>
-            <p:nvSpPr>
-              <p:cNvPr id="2" name="CuadroTexto 1">
-                <a:extLst>
-                  <a:ext uri="{FF2B5EF4-FFF2-40B4-BE49-F238E27FC236}">
-                    <a16:creationId xmlns:a16="http://schemas.microsoft.com/office/drawing/2014/main" id="{A440F587-93A3-E474-C0B0-883BB9DAFD85}"/>
-                  </a:ext>
-                </a:extLst>
-              </p:cNvPr>
-              <p:cNvSpPr txBox="1">
-                <a:spLocks noRot="1" noChangeAspect="1" noMove="1" noResize="1" noEditPoints="1" noAdjustHandles="1" noChangeArrowheads="1" noChangeShapeType="1" noTextEdit="1"/>
-              </p:cNvSpPr>
-              <p:nvPr/>
-            </p:nvSpPr>
-            <p:spPr>
-              <a:xfrm>
-                <a:off x="609441" y="4860334"/>
-                <a:ext cx="11198542" cy="1361911"/>
-              </a:xfrm>
-              <a:prstGeom prst="rect">
-                <a:avLst/>
-              </a:prstGeom>
-              <a:blipFill>
-                <a:blip r:embed="rId6"/>
-                <a:stretch>
-                  <a:fillRect/>
-                </a:stretch>
-              </a:blipFill>
-              <a:ln w="28575">
-                <a:solidFill>
-                  <a:srgbClr val="E0700D"/>
-                </a:solidFill>
-              </a:ln>
-            </p:spPr>
-            <p:txBody>
-              <a:bodyPr/>
-              <a:lstStyle/>
-              <a:p>
-                <a:r>
-                  <a:rPr lang="es-ES">
-                    <a:noFill/>
-                  </a:rPr>
-                  <a:t> </a:t>
-                </a:r>
-              </a:p>
-            </p:txBody>
-          </p:sp>
-        </mc:Fallback>
-      </mc:AlternateContent>
+      <p:sp>
+        <p:nvSpPr>
+          <p:cNvPr id="2" name="CuadroTexto 1">
+            <a:extLst>
+              <a:ext uri="{FF2B5EF4-FFF2-40B4-BE49-F238E27FC236}">
+                <a16:creationId xmlns:a16="http://schemas.microsoft.com/office/drawing/2014/main" id="{A440F587-93A3-E474-C0B0-883BB9DAFD85}"/>
+              </a:ext>
+            </a:extLst>
+          </p:cNvPr>
+          <p:cNvSpPr txBox="1"/>
+          <p:nvPr/>
+        </p:nvSpPr>
+        <p:spPr>
+          <a:xfrm>
+            <a:off x="609441" y="4860334"/>
+            <a:ext cx="11198542" cy="1015663"/>
+          </a:xfrm>
+          <a:prstGeom prst="rect">
+            <a:avLst/>
+          </a:prstGeom>
+          <a:solidFill>
+            <a:schemeClr val="bg1">
+              <a:lumMod val="95000"/>
+            </a:schemeClr>
+          </a:solidFill>
+          <a:ln w="28575">
+            <a:solidFill>
+              <a:srgbClr val="E0700D"/>
+            </a:solidFill>
+          </a:ln>
+        </p:spPr>
+        <p:txBody>
+          <a:bodyPr wrap="square" rtlCol="0">
+            <a:spAutoFit/>
+          </a:bodyPr>
+          <a:lstStyle/>
+          <a:p>
+            <a:pPr algn="just"/>
+            <a:r>
+              <a:rPr lang="en-US" sz="1500" dirty="0"/>
+              <a:t>The compact model accurately describes the wavelength dependence of the fundamental TE and TM modes in both waveguides. In both structures, the effective index decreases smoothly as the wavelength increases, and the fitted curves match the simulated data well. The shallow waveguide shows slightly higher effective index values, while the deep waveguide maintains a slightly larger group index. In all cases, dispersion remains very small and negative, confirming a weak dependence on wavelength in the studied range.</a:t>
+            </a:r>
+            <a:endParaRPr lang="en-US" sz="1500" dirty="0">
+              <a:latin typeface="Arial" panose="020B0604020202020204" pitchFamily="34" charset="0"/>
+              <a:cs typeface="Arial" panose="020B0604020202020204" pitchFamily="34" charset="0"/>
+            </a:endParaRPr>
+          </a:p>
+        </p:txBody>
+      </p:sp>
       <p:sp>
         <p:nvSpPr>
           <p:cNvPr id="5" name="Rectángulo 4">
@@ -6996,347 +6387,66 @@
           </a:p>
         </p:txBody>
       </p:sp>
-      <mc:AlternateContent xmlns:mc="http://schemas.openxmlformats.org/markup-compatibility/2006" xmlns:a14="http://schemas.microsoft.com/office/drawing/2010/main">
-        <mc:Choice Requires="a14">
-          <p:sp>
-            <p:nvSpPr>
-              <p:cNvPr id="9" name="CuadroTexto 8">
-                <a:extLst>
-                  <a:ext uri="{FF2B5EF4-FFF2-40B4-BE49-F238E27FC236}">
-                    <a16:creationId xmlns:a16="http://schemas.microsoft.com/office/drawing/2014/main" id="{C59B6428-4395-242F-54D8-A9FC610F2D7A}"/>
-                  </a:ext>
-                </a:extLst>
-              </p:cNvPr>
-              <p:cNvSpPr txBox="1"/>
-              <p:nvPr/>
-            </p:nvSpPr>
-            <p:spPr>
-              <a:xfrm>
-                <a:off x="609440" y="2709096"/>
-                <a:ext cx="5486559" cy="1200329"/>
-              </a:xfrm>
-              <a:prstGeom prst="rect">
-                <a:avLst/>
-              </a:prstGeom>
-              <a:noFill/>
-            </p:spPr>
-            <p:txBody>
-              <a:bodyPr wrap="square" rtlCol="0">
-                <a:spAutoFit/>
-              </a:bodyPr>
-              <a:lstStyle/>
-              <a:p>
-                <a:pPr algn="ctr"/>
-                <a:r>
-                  <a:rPr lang="en-US" b="1" dirty="0"/>
-                  <a:t>deep</a:t>
-                </a:r>
-                <a:r>
-                  <a:rPr lang="en-US" dirty="0"/>
-                  <a:t> waveguide</a:t>
-                </a:r>
-              </a:p>
-              <a:p>
-                <a:pPr algn="ctr"/>
-                <a:endParaRPr lang="en-US" dirty="0"/>
-              </a:p>
-              <a:p>
-                <a:pPr algn="ctr"/>
-                <a:r>
-                  <a:rPr lang="en-US" b="1" dirty="0"/>
-                  <a:t>neff_TE0 vs </a:t>
-                </a:r>
-                <a14:m>
-                  <m:oMath xmlns:m="http://schemas.openxmlformats.org/officeDocument/2006/math">
-                    <m:r>
-                      <a:rPr lang="es-ES" b="1" i="1" smtClean="0">
-                        <a:latin typeface="Cambria Math" panose="02040503050406030204" pitchFamily="18" charset="0"/>
-                      </a:rPr>
-                      <m:t>𝝀</m:t>
-                    </m:r>
-                  </m:oMath>
-                </a14:m>
-                <a:r>
-                  <a:rPr lang="en-US" b="1" dirty="0"/>
-                  <a:t> </a:t>
-                </a:r>
-                <a:r>
-                  <a:rPr lang="en-US" dirty="0"/>
-                  <a:t>with the second-degree polynomial fit  </a:t>
-                </a:r>
-              </a:p>
-              <a:p>
-                <a:pPr algn="ctr"/>
-                <a:r>
-                  <a:rPr lang="en-US" dirty="0"/>
-                  <a:t>&amp; </a:t>
-                </a:r>
-                <a:r>
-                  <a:rPr lang="en-US" b="1" dirty="0"/>
-                  <a:t>neff_TM0 vs </a:t>
-                </a:r>
-                <a14:m>
-                  <m:oMath xmlns:m="http://schemas.openxmlformats.org/officeDocument/2006/math">
-                    <m:r>
-                      <a:rPr lang="es-ES" b="1" i="1">
-                        <a:latin typeface="Cambria Math" panose="02040503050406030204" pitchFamily="18" charset="0"/>
-                      </a:rPr>
-                      <m:t>𝝀</m:t>
-                    </m:r>
-                  </m:oMath>
-                </a14:m>
-                <a:r>
-                  <a:rPr lang="en-US" b="1" dirty="0"/>
-                  <a:t> </a:t>
-                </a:r>
-                <a:r>
-                  <a:rPr lang="en-US" dirty="0"/>
-                  <a:t>with the second-degree polynomial fit </a:t>
-                </a:r>
-              </a:p>
-            </p:txBody>
-          </p:sp>
-        </mc:Choice>
-        <mc:Fallback xmlns="">
-          <p:sp>
-            <p:nvSpPr>
-              <p:cNvPr id="9" name="CuadroTexto 8">
-                <a:extLst>
-                  <a:ext uri="{FF2B5EF4-FFF2-40B4-BE49-F238E27FC236}">
-                    <a16:creationId xmlns:a16="http://schemas.microsoft.com/office/drawing/2014/main" id="{C59B6428-4395-242F-54D8-A9FC610F2D7A}"/>
-                  </a:ext>
-                </a:extLst>
-              </p:cNvPr>
-              <p:cNvSpPr txBox="1">
-                <a:spLocks noRot="1" noChangeAspect="1" noMove="1" noResize="1" noEditPoints="1" noAdjustHandles="1" noChangeArrowheads="1" noChangeShapeType="1" noTextEdit="1"/>
-              </p:cNvSpPr>
-              <p:nvPr/>
-            </p:nvSpPr>
-            <p:spPr>
-              <a:xfrm>
-                <a:off x="609440" y="2709096"/>
-                <a:ext cx="5486559" cy="1200329"/>
-              </a:xfrm>
-              <a:prstGeom prst="rect">
-                <a:avLst/>
-              </a:prstGeom>
-              <a:blipFill>
-                <a:blip r:embed="rId7"/>
-                <a:stretch>
-                  <a:fillRect t="-2538" r="-556" b="-7107"/>
-                </a:stretch>
-              </a:blipFill>
-            </p:spPr>
-            <p:txBody>
-              <a:bodyPr/>
-              <a:lstStyle/>
-              <a:p>
-                <a:r>
-                  <a:rPr lang="es-ES">
-                    <a:noFill/>
-                  </a:rPr>
-                  <a:t> </a:t>
-                </a:r>
-              </a:p>
-            </p:txBody>
-          </p:sp>
-        </mc:Fallback>
-      </mc:AlternateContent>
-      <mc:AlternateContent xmlns:mc="http://schemas.openxmlformats.org/markup-compatibility/2006" xmlns:a14="http://schemas.microsoft.com/office/drawing/2010/main">
-        <mc:Choice Requires="a14">
-          <p:sp>
-            <p:nvSpPr>
-              <p:cNvPr id="10" name="CuadroTexto 9">
-                <a:extLst>
-                  <a:ext uri="{FF2B5EF4-FFF2-40B4-BE49-F238E27FC236}">
-                    <a16:creationId xmlns:a16="http://schemas.microsoft.com/office/drawing/2014/main" id="{9320AF78-1FC6-19F4-8E0B-8A414F20C6DE}"/>
-                  </a:ext>
-                </a:extLst>
-              </p:cNvPr>
-              <p:cNvSpPr txBox="1"/>
-              <p:nvPr/>
-            </p:nvSpPr>
-            <p:spPr>
-              <a:xfrm>
-                <a:off x="6321421" y="2709096"/>
-                <a:ext cx="5486559" cy="1200329"/>
-              </a:xfrm>
-              <a:prstGeom prst="rect">
-                <a:avLst/>
-              </a:prstGeom>
-              <a:noFill/>
-            </p:spPr>
-            <p:txBody>
-              <a:bodyPr wrap="square" rtlCol="0">
-                <a:spAutoFit/>
-              </a:bodyPr>
-              <a:lstStyle/>
-              <a:p>
-                <a:pPr algn="ctr"/>
-                <a:r>
-                  <a:rPr lang="en-US" b="1" dirty="0"/>
-                  <a:t>shallow</a:t>
-                </a:r>
-                <a:r>
-                  <a:rPr lang="en-US" dirty="0"/>
-                  <a:t> waveguide</a:t>
-                </a:r>
-              </a:p>
-              <a:p>
-                <a:pPr algn="ctr"/>
-                <a:endParaRPr lang="en-US" dirty="0"/>
-              </a:p>
-              <a:p>
-                <a:pPr algn="ctr"/>
-                <a:r>
-                  <a:rPr lang="en-US" b="1" dirty="0"/>
-                  <a:t>neff_TE0 vs </a:t>
-                </a:r>
-                <a14:m>
-                  <m:oMath xmlns:m="http://schemas.openxmlformats.org/officeDocument/2006/math">
-                    <m:r>
-                      <a:rPr lang="es-ES" b="1" i="1">
-                        <a:latin typeface="Cambria Math" panose="02040503050406030204" pitchFamily="18" charset="0"/>
-                      </a:rPr>
-                      <m:t>𝝀</m:t>
-                    </m:r>
-                  </m:oMath>
-                </a14:m>
-                <a:r>
-                  <a:rPr lang="en-US" b="1" dirty="0"/>
-                  <a:t> </a:t>
-                </a:r>
-                <a:r>
-                  <a:rPr lang="en-US" dirty="0"/>
-                  <a:t>with the second-degree polynomial fit  </a:t>
-                </a:r>
-              </a:p>
-              <a:p>
-                <a:pPr algn="ctr"/>
-                <a:r>
-                  <a:rPr lang="en-US" dirty="0"/>
-                  <a:t>&amp; </a:t>
-                </a:r>
-                <a:r>
-                  <a:rPr lang="en-US" b="1" dirty="0"/>
-                  <a:t>neff_TM0 vs </a:t>
-                </a:r>
-                <a14:m>
-                  <m:oMath xmlns:m="http://schemas.openxmlformats.org/officeDocument/2006/math">
-                    <m:r>
-                      <a:rPr lang="es-ES" b="1" i="1">
-                        <a:latin typeface="Cambria Math" panose="02040503050406030204" pitchFamily="18" charset="0"/>
-                      </a:rPr>
-                      <m:t>𝝀</m:t>
-                    </m:r>
-                  </m:oMath>
-                </a14:m>
-                <a:r>
-                  <a:rPr lang="en-US" b="1" dirty="0"/>
-                  <a:t> </a:t>
-                </a:r>
-                <a:r>
-                  <a:rPr lang="en-US" dirty="0"/>
-                  <a:t>with the second-degree polynomial fit </a:t>
-                </a:r>
-              </a:p>
-            </p:txBody>
-          </p:sp>
-        </mc:Choice>
-        <mc:Fallback xmlns="">
-          <p:sp>
-            <p:nvSpPr>
-              <p:cNvPr id="10" name="CuadroTexto 9">
-                <a:extLst>
-                  <a:ext uri="{FF2B5EF4-FFF2-40B4-BE49-F238E27FC236}">
-                    <a16:creationId xmlns:a16="http://schemas.microsoft.com/office/drawing/2014/main" id="{9320AF78-1FC6-19F4-8E0B-8A414F20C6DE}"/>
-                  </a:ext>
-                </a:extLst>
-              </p:cNvPr>
-              <p:cNvSpPr txBox="1">
-                <a:spLocks noRot="1" noChangeAspect="1" noMove="1" noResize="1" noEditPoints="1" noAdjustHandles="1" noChangeArrowheads="1" noChangeShapeType="1" noTextEdit="1"/>
-              </p:cNvSpPr>
-              <p:nvPr/>
-            </p:nvSpPr>
-            <p:spPr>
-              <a:xfrm>
-                <a:off x="6321421" y="2709096"/>
-                <a:ext cx="5486559" cy="1200329"/>
-              </a:xfrm>
-              <a:prstGeom prst="rect">
-                <a:avLst/>
-              </a:prstGeom>
-              <a:blipFill>
-                <a:blip r:embed="rId8"/>
-                <a:stretch>
-                  <a:fillRect t="-2538" r="-556" b="-7107"/>
-                </a:stretch>
-              </a:blipFill>
-            </p:spPr>
-            <p:txBody>
-              <a:bodyPr/>
-              <a:lstStyle/>
-              <a:p>
-                <a:r>
-                  <a:rPr lang="es-ES">
-                    <a:noFill/>
-                  </a:rPr>
-                  <a:t> </a:t>
-                </a:r>
-              </a:p>
-            </p:txBody>
-          </p:sp>
-        </mc:Fallback>
-      </mc:AlternateContent>
-      <p:sp>
-        <p:nvSpPr>
-          <p:cNvPr id="8" name="CuadroTexto 7">
-            <a:extLst>
-              <a:ext uri="{FF2B5EF4-FFF2-40B4-BE49-F238E27FC236}">
-                <a16:creationId xmlns:a16="http://schemas.microsoft.com/office/drawing/2014/main" id="{0F38E924-A0E7-A039-C837-916BA77FE89B}"/>
-              </a:ext>
-            </a:extLst>
-          </p:cNvPr>
-          <p:cNvSpPr txBox="1"/>
+      <p:pic>
+        <p:nvPicPr>
+          <p:cNvPr id="7" name="Imagen 6">
+            <a:extLst>
+              <a:ext uri="{FF2B5EF4-FFF2-40B4-BE49-F238E27FC236}">
+                <a16:creationId xmlns:a16="http://schemas.microsoft.com/office/drawing/2014/main" id="{6E9593BF-98E8-2CED-3D08-DEF765B15A68}"/>
+              </a:ext>
+            </a:extLst>
+          </p:cNvPr>
+          <p:cNvPicPr>
+            <a:picLocks noChangeAspect="1"/>
+          </p:cNvPicPr>
           <p:nvPr/>
-        </p:nvSpPr>
-        <p:spPr>
-          <a:xfrm>
-            <a:off x="6347361" y="4498712"/>
-            <a:ext cx="5486560" cy="276999"/>
+        </p:nvPicPr>
+        <p:blipFill>
+          <a:blip r:embed="rId5"/>
+          <a:stretch>
+            <a:fillRect/>
+          </a:stretch>
+        </p:blipFill>
+        <p:spPr>
+          <a:xfrm>
+            <a:off x="909245" y="1509127"/>
+            <a:ext cx="4709676" cy="3161362"/>
           </a:xfrm>
           <a:prstGeom prst="rect">
             <a:avLst/>
           </a:prstGeom>
-          <a:noFill/>
-        </p:spPr>
-        <p:txBody>
-          <a:bodyPr wrap="square">
-            <a:spAutoFit/>
-          </a:bodyPr>
-          <a:lstStyle/>
-          <a:p>
-            <a:pPr algn="r"/>
-            <a:r>
-              <a:rPr lang="en-US" sz="1200" b="1" dirty="0">
-                <a:solidFill>
-                  <a:schemeClr val="tx1"/>
-                </a:solidFill>
-                <a:latin typeface="Arial" panose="020B0604020202020204" pitchFamily="34" charset="0"/>
-                <a:cs typeface="Arial" panose="020B0604020202020204" pitchFamily="34" charset="0"/>
-              </a:rPr>
-              <a:t>slab: 150nm</a:t>
-            </a:r>
-            <a:endParaRPr lang="en-US" sz="1200" dirty="0">
-              <a:solidFill>
-                <a:schemeClr val="tx1"/>
-              </a:solidFill>
-              <a:latin typeface="Arial" panose="020B0604020202020204" pitchFamily="34" charset="0"/>
-              <a:cs typeface="Arial" panose="020B0604020202020204" pitchFamily="34" charset="0"/>
-            </a:endParaRPr>
-          </a:p>
-        </p:txBody>
-      </p:sp>
+        </p:spPr>
+      </p:pic>
+      <p:pic>
+        <p:nvPicPr>
+          <p:cNvPr id="11" name="Imagen 10">
+            <a:extLst>
+              <a:ext uri="{FF2B5EF4-FFF2-40B4-BE49-F238E27FC236}">
+                <a16:creationId xmlns:a16="http://schemas.microsoft.com/office/drawing/2014/main" id="{F711D64F-3819-D75F-F28A-330A8BA6D83A}"/>
+              </a:ext>
+            </a:extLst>
+          </p:cNvPr>
+          <p:cNvPicPr>
+            <a:picLocks noChangeAspect="1"/>
+          </p:cNvPicPr>
+          <p:nvPr/>
+        </p:nvPicPr>
+        <p:blipFill>
+          <a:blip r:embed="rId6"/>
+          <a:stretch>
+            <a:fillRect/>
+          </a:stretch>
+        </p:blipFill>
+        <p:spPr>
+          <a:xfrm>
+            <a:off x="7010400" y="1546745"/>
+            <a:ext cx="4272355" cy="3108138"/>
+          </a:xfrm>
+          <a:prstGeom prst="rect">
+            <a:avLst/>
+          </a:prstGeom>
+        </p:spPr>
+      </p:pic>
     </p:spTree>
     <p:extLst>
       <p:ext uri="{BB962C8B-B14F-4D97-AF65-F5344CB8AC3E}">
@@ -7555,7 +6665,7 @@
         <p:spPr>
           <a:xfrm>
             <a:off x="609441" y="4860334"/>
-            <a:ext cx="11199971" cy="1200329"/>
+            <a:ext cx="11199971" cy="1015663"/>
           </a:xfrm>
           <a:prstGeom prst="rect">
             <a:avLst/>
@@ -7577,49 +6687,39 @@
           </a:bodyPr>
           <a:lstStyle/>
           <a:p>
-            <a:pPr algn="just"/>
-            <a:r>
-              <a:rPr lang="en-US" sz="1200" dirty="0">
-                <a:latin typeface="Arial" panose="020B0604020202020204" pitchFamily="34" charset="0"/>
-                <a:cs typeface="Arial" panose="020B0604020202020204" pitchFamily="34" charset="0"/>
-              </a:rPr>
-              <a:t>Comment results, which is the safe radius?, consider safe means less than 0.1 dB/90º.</a:t>
-            </a:r>
-          </a:p>
-          <a:p>
-            <a:pPr algn="just"/>
-            <a:endParaRPr lang="en-US" sz="1200" u="sng" dirty="0">
-              <a:latin typeface="Arial" panose="020B0604020202020204" pitchFamily="34" charset="0"/>
-              <a:cs typeface="Arial" panose="020B0604020202020204" pitchFamily="34" charset="0"/>
-            </a:endParaRPr>
-          </a:p>
-          <a:p>
-            <a:pPr algn="just"/>
-            <a:endParaRPr lang="en-US" sz="1200" dirty="0">
-              <a:latin typeface="Arial" panose="020B0604020202020204" pitchFamily="34" charset="0"/>
-              <a:cs typeface="Arial" panose="020B0604020202020204" pitchFamily="34" charset="0"/>
-            </a:endParaRPr>
-          </a:p>
-          <a:p>
-            <a:pPr algn="just"/>
-            <a:endParaRPr lang="en-US" sz="1200" dirty="0">
-              <a:latin typeface="Arial" panose="020B0604020202020204" pitchFamily="34" charset="0"/>
-              <a:cs typeface="Arial" panose="020B0604020202020204" pitchFamily="34" charset="0"/>
-            </a:endParaRPr>
-          </a:p>
-          <a:p>
-            <a:pPr algn="just"/>
-            <a:endParaRPr lang="en-US" sz="1200" dirty="0">
-              <a:latin typeface="Arial" panose="020B0604020202020204" pitchFamily="34" charset="0"/>
-              <a:cs typeface="Arial" panose="020B0604020202020204" pitchFamily="34" charset="0"/>
-            </a:endParaRPr>
-          </a:p>
-          <a:p>
-            <a:pPr algn="just"/>
-            <a:endParaRPr lang="en-US" sz="1200" dirty="0">
-              <a:latin typeface="Arial" panose="020B0604020202020204" pitchFamily="34" charset="0"/>
-              <a:cs typeface="Arial" panose="020B0604020202020204" pitchFamily="34" charset="0"/>
-            </a:endParaRPr>
+            <a:pPr algn="l">
+              <a:defRPr sz="1500" b="0"/>
+            </a:pPr>
+            <a:r>
+              <a:rPr dirty="0"/>
+              <a:t>Mode-mismatch dominates the smallest radius and pushes the 25 um bend above the 0.1 dB/90 deg target.</a:t>
+            </a:r>
+          </a:p>
+          <a:p>
+            <a:pPr algn="l">
+              <a:defRPr sz="1500" b="0"/>
+            </a:pPr>
+            <a:r>
+              <a:rPr dirty="0"/>
+              <a:t>The first simulated safe radius is 50 um, with a total loss of 0.04</a:t>
+            </a:r>
+            <a:r>
+              <a:rPr lang="es-ES" dirty="0"/>
+              <a:t>19</a:t>
+            </a:r>
+            <a:r>
+              <a:rPr dirty="0"/>
+              <a:t> dB/90 deg.</a:t>
+            </a:r>
+          </a:p>
+          <a:p>
+            <a:pPr algn="l">
+              <a:defRPr sz="1500" b="0"/>
+            </a:pPr>
+            <a:r>
+              <a:rPr dirty="0"/>
+              <a:t>The minimum loss in the sweep appears around 75-100 um, where total loss stays near 0.033-0.034 dB/90 deg and neff_TE0 is almost constant.</a:t>
+            </a:r>
           </a:p>
         </p:txBody>
       </p:sp>
@@ -7703,29 +6803,43 @@
           </a:bodyPr>
           <a:lstStyle/>
           <a:p>
-            <a:pPr algn="ctr"/>
-            <a:r>
-              <a:rPr lang="en-US" b="1" dirty="0"/>
-              <a:t>deep</a:t>
-            </a:r>
-            <a:r>
-              <a:rPr lang="en-US" dirty="0"/>
-              <a:t> waveguide</a:t>
-            </a:r>
-          </a:p>
-          <a:p>
-            <a:pPr algn="ctr"/>
-            <a:endParaRPr lang="en-US" dirty="0"/>
-          </a:p>
-          <a:p>
-            <a:pPr algn="ctr"/>
-            <a:r>
-              <a:rPr lang="en-US" dirty="0"/>
-              <a:t>Paste Total Loss (dB/90º) vs R &amp; neff_TE0 vs R</a:t>
-            </a:r>
-          </a:p>
-        </p:txBody>
-      </p:sp>
+            <a:pPr algn="l">
+              <a:defRPr sz="100" b="0"/>
+            </a:pPr>
+            <a:endParaRPr/>
+          </a:p>
+        </p:txBody>
+      </p:sp>
+      <p:pic>
+        <p:nvPicPr>
+          <p:cNvPr id="5" name="Imagen 4">
+            <a:extLst>
+              <a:ext uri="{FF2B5EF4-FFF2-40B4-BE49-F238E27FC236}">
+                <a16:creationId xmlns:a16="http://schemas.microsoft.com/office/drawing/2014/main" id="{96254EA2-F703-95CD-B90B-D7F35583944F}"/>
+              </a:ext>
+            </a:extLst>
+          </p:cNvPr>
+          <p:cNvPicPr>
+            <a:picLocks noChangeAspect="1"/>
+          </p:cNvPicPr>
+          <p:nvPr/>
+        </p:nvPicPr>
+        <p:blipFill>
+          <a:blip r:embed="rId5"/>
+          <a:stretch>
+            <a:fillRect/>
+          </a:stretch>
+        </p:blipFill>
+        <p:spPr>
+          <a:xfrm>
+            <a:off x="1359692" y="1549441"/>
+            <a:ext cx="9472613" cy="3107081"/>
+          </a:xfrm>
+          <a:prstGeom prst="rect">
+            <a:avLst/>
+          </a:prstGeom>
+        </p:spPr>
+      </p:pic>
     </p:spTree>
     <p:extLst>
       <p:ext uri="{BB962C8B-B14F-4D97-AF65-F5344CB8AC3E}">
